--- a/seminarski-2/Obrada transakcija, planovi izvršavanja transakcija, izolacija i zaključavanje u Firebird bazi podataka.pptx
+++ b/seminarski-2/Obrada transakcija, planovi izvršavanja transakcija, izolacija i zaključavanje u Firebird bazi podataka.pptx
@@ -2774,7 +2774,7 @@
               <a:t>baza</a:t>
             </a:r>
             <a:r>
-              <a:rPr lang="en-US"/>
+              <a:rPr lang="en-US" dirty="0"/>
               <a:t>.</a:t>
             </a:r>
           </a:p>
@@ -9966,13 +9966,7 @@
                   <a:rPr lang="en-US" b="1" dirty="0">
                     <a:effectLst/>
                   </a:rPr>
-                  <a:t>Snapshot READ ONLY</a:t>
-                </a:r>
-                <a:r>
-                  <a:rPr lang="en-US" dirty="0">
-                    <a:effectLst/>
-                  </a:rPr>
-                  <a:t> </a:t>
+                  <a:t>Snapshot </a:t>
                 </a:r>
                 <a:r>
                   <a:rPr lang="en-US" dirty="0" err="1">
@@ -11404,13 +11398,7 @@
                   <a:rPr lang="en-US" b="1" dirty="0">
                     <a:effectLst/>
                   </a:rPr>
-                  <a:t>Snapshot READ ONLY</a:t>
-                </a:r>
-                <a:r>
-                  <a:rPr lang="en-US" dirty="0">
-                    <a:effectLst/>
-                  </a:rPr>
-                  <a:t> </a:t>
+                  <a:t>Snapshot </a:t>
                 </a:r>
                 <a:r>
                   <a:rPr lang="en-US" dirty="0" err="1">
@@ -29686,7 +29674,7 @@
                 <a:ea typeface="Calibri" pitchFamily="34" charset="-122"/>
                 <a:cs typeface="Calibri" pitchFamily="34" charset="-120"/>
               </a:rPr>
-              <a:t>Snapshot READ ONLY — zamrznuta slika</a:t>
+              <a:t>Snapshot — zamrznuta slika</a:t>
             </a:r>
             <a:endParaRPr lang="en-US" sz="1200" dirty="0">
               <a:solidFill>
